--- a/reports/07-plan-vs-actual.pptx
+++ b/reports/07-plan-vs-actual.pptx
@@ -107,7 +107,7 @@
   <p:extLst>
     <p:ext uri="{521415D9-36F7-43E2-AB2F-B90AF26B5E84}">
       <p14:sectionLst xmlns:p14="http://schemas.microsoft.com/office/powerpoint/2010/main">
-        <p14:section name="Plan vs actual" id="{57d66bbe-3d87-96b8-9b63-74f9e09f5c71}">
+        <p14:section name="Plan vs actual" id="{17b73543-59e9-41c2-f85d-f43c273266e0}">
           <p14:sldIdLst>
             <p14:sldId id="256"/>
           </p14:sldIdLst>
